--- a/Schools_ML_Track/camp_2026/slides/ML/ML20.pptx
+++ b/Schools_ML_Track/camp_2026/slides/ML/ML20.pptx
@@ -129,7 +129,7 @@
   <p:extLst>
     <p:ext uri="{521415D9-36F7-43E2-AB2F-B90AF26B5E84}">
       <p14:sectionLst xmlns:p14="http://schemas.microsoft.com/office/powerpoint/2010/main">
-        <p14:section name="Opening" id="{32582d0a-b878-3342-22e6-74d0d3ac0649}">
+        <p14:section name="Opening" id="{64999e1b-26c9-6370-65c6-5a7d94e3008d}">
           <p14:sldIdLst>
             <p14:sldId id="256"/>
             <p14:sldId id="257"/>
@@ -140,7 +140,7 @@
             <p14:sldId id="262"/>
           </p14:sldIdLst>
         </p14:section>
-        <p14:section name="Block A" id="{a8a4e2f5-bc0c-165c-b805-327e113fdca7}">
+        <p14:section name="Block A" id="{6be3366c-261d-4298-d1d2-ac86bf7722c6}">
           <p14:sldIdLst>
             <p14:sldId id="263"/>
             <p14:sldId id="264"/>
@@ -151,15 +151,15 @@
             <p14:sldId id="270"/>
           </p14:sldIdLst>
         </p14:section>
-        <p14:section name="Break" id="{aa123ae9-8a7e-ac0d-b7f0-ef8265523d48}">
+        <p14:section name="Break" id="{a77feac5-0168-80dd-a9c6-c359a1eb694c}">
           <p14:sldIdLst>
             <p14:sldId id="268"/>
           </p14:sldIdLst>
         </p14:section>
-        <p14:section name="Block A" id="{f45dc0f6-3b22-7c60-df99-7ee0076ae4ec}">
+        <p14:section name="Block A" id="{2f223fa9-7dd5-d074-d93e-74932f8f718b}">
           <p14:sldIdLst/>
         </p14:section>
-        <p14:section name="Block B" id="{9dd54037-8ceb-2879-b77e-9a52eb9eae03}">
+        <p14:section name="Block B" id="{b71d2f87-6d61-f022-6df3-e0722a11eaa1}">
           <p14:sldIdLst>
             <p14:sldId id="271"/>
             <p14:sldId id="272"/>
@@ -168,7 +168,7 @@
             <p14:sldId id="275"/>
           </p14:sldIdLst>
         </p14:section>
-        <p14:section name="Make and close" id="{228db8fc-cf42-4fbf-8b44-9868137f503f}">
+        <p14:section name="Make and close" id="{074a2cd9-2a42-c512-4358-1ec369c35e0d}">
           <p14:sldIdLst>
             <p14:sldId id="276"/>
             <p14:sldId id="277"/>

--- a/Schools_ML_Track/camp_2026/slides/ML/ML20.pptx
+++ b/Schools_ML_Track/camp_2026/slides/ML/ML20.pptx
@@ -129,7 +129,7 @@
   <p:extLst>
     <p:ext uri="{521415D9-36F7-43E2-AB2F-B90AF26B5E84}">
       <p14:sectionLst xmlns:p14="http://schemas.microsoft.com/office/powerpoint/2010/main">
-        <p14:section name="Opening" id="{64999e1b-26c9-6370-65c6-5a7d94e3008d}">
+        <p14:section name="Opening" id="{d7e608e9-2002-caae-e817-cbcabfbfe6e3}">
           <p14:sldIdLst>
             <p14:sldId id="256"/>
             <p14:sldId id="257"/>
@@ -140,7 +140,7 @@
             <p14:sldId id="262"/>
           </p14:sldIdLst>
         </p14:section>
-        <p14:section name="Block A" id="{6be3366c-261d-4298-d1d2-ac86bf7722c6}">
+        <p14:section name="Block A" id="{8c8c3beb-5c3f-f99f-c8c8-6c2c6ab1d42a}">
           <p14:sldIdLst>
             <p14:sldId id="263"/>
             <p14:sldId id="264"/>
@@ -151,15 +151,15 @@
             <p14:sldId id="270"/>
           </p14:sldIdLst>
         </p14:section>
-        <p14:section name="Break" id="{a77feac5-0168-80dd-a9c6-c359a1eb694c}">
+        <p14:section name="Break" id="{6f60da74-8ab0-ad8b-00c7-28f319462ca8}">
           <p14:sldIdLst>
             <p14:sldId id="268"/>
           </p14:sldIdLst>
         </p14:section>
-        <p14:section name="Block A" id="{2f223fa9-7dd5-d074-d93e-74932f8f718b}">
+        <p14:section name="Block A" id="{020b549b-27a5-6651-1f05-2d2d68bc78a9}">
           <p14:sldIdLst/>
         </p14:section>
-        <p14:section name="Block B" id="{b71d2f87-6d61-f022-6df3-e0722a11eaa1}">
+        <p14:section name="Block B" id="{96c0515f-114f-47ef-3f00-e33013351cbd}">
           <p14:sldIdLst>
             <p14:sldId id="271"/>
             <p14:sldId id="272"/>
@@ -168,7 +168,7 @@
             <p14:sldId id="275"/>
           </p14:sldIdLst>
         </p14:section>
-        <p14:section name="Make and close" id="{074a2cd9-2a42-c512-4358-1ec369c35e0d}">
+        <p14:section name="Make and close" id="{49dfeaa0-e892-9fdb-730c-4d584a622128}">
           <p14:sldIdLst>
             <p14:sldId id="276"/>
             <p14:sldId id="277"/>
@@ -2462,7 +2462,8 @@
           <a:p>
             <a:r>
               <a:rPr lang="en-US" dirty="0"/>
-              <a:t>Read this first part of the code with me before we run anything. ['Use the fares as the worked example, then repeat with your own dataset.', 'Lock 20% away, take 25% of the rest for validation, and fit the mean guess on training only.']</a:t>
+              <a:t>Use the fares as the worked example, then repeat with your own dataset. Lock 20% away, take 25% of the rest for validation, and fit the mean guess on training only.
+This is the part where you decide. Predict the three sizes and whether the baseline will miss fares by more than UGX 3000 on average. Put it on paper first. We will check it together in a moment.</a:t>
             </a:r>
             <a:endParaRPr lang="en-US" dirty="0"/>
           </a:p>
@@ -2550,8 +2551,7 @@
           <a:p>
             <a:r>
               <a:rPr lang="en-US" dirty="0"/>
-              <a:t>Use the fares as the worked example, then repeat with your own dataset. Lock 20% away, take 25% of the rest for validation, and fit the mean guess on training only.
-This is the part where you decide. Predict the three sizes and whether the baseline will miss fares by more than UGX 3000 on average. Put it on paper first. We will check it together in a moment.</a:t>
+              <a:t>Here is the rest of the code. Read it through once. Then write your guess on paper before we run anything.</a:t>
             </a:r>
             <a:endParaRPr lang="en-US" dirty="0"/>
           </a:p>
@@ -6580,15 +6580,15 @@
           <a:p>
             <a:pPr algn="l" indent="0" marL="0">
               <a:lnSpc>
-                <a:spcPts val="3480"/>
+                <a:spcPts val="3120"/>
               </a:lnSpc>
               <a:spcAft>
-                <a:spcPts val="2520"/>
+                <a:spcPts val="2020"/>
               </a:spcAft>
               <a:buNone/>
             </a:pPr>
             <a:r>
-              <a:rPr lang="en-US" sz="2900" dirty="0">
+              <a:rPr lang="en-US" sz="2600" dirty="0">
                 <a:solidFill>
                   <a:srgbClr val="111111"/>
                 </a:solidFill>
@@ -6596,22 +6596,22 @@
                 <a:ea typeface="Lato" pitchFamily="34" charset="-122"/>
                 <a:cs typeface="Lato" pitchFamily="34" charset="-120"/>
               </a:rPr>
-              <a:t>Complete the three-way split, the baseline and one labelled chart for your own project dataset. Save the notebook, your data dictionary and the cleaning log. If no cleaning was needed, record the checks that found nothing.</a:t>
-            </a:r>
-            <a:endParaRPr lang="en-US" sz="2900" dirty="0"/>
-          </a:p>
-          <a:p>
-            <a:pPr algn="l" indent="0" marL="0">
-              <a:lnSpc>
-                <a:spcPts val="3480"/>
+              <a:t>Complete the three-way split, the baseline and one labelled chart for your own project dataset.</a:t>
+            </a:r>
+            <a:endParaRPr lang="en-US" sz="2600" dirty="0"/>
+          </a:p>
+          <a:p>
+            <a:pPr algn="l" indent="0" marL="0">
+              <a:lnSpc>
+                <a:spcPts val="3120"/>
               </a:lnSpc>
               <a:spcAft>
-                <a:spcPts val="2520"/>
+                <a:spcPts val="2020"/>
               </a:spcAft>
               <a:buNone/>
             </a:pPr>
             <a:r>
-              <a:rPr lang="en-US" sz="2900" dirty="0">
+              <a:rPr lang="en-US" sz="2600" dirty="0">
                 <a:solidFill>
                   <a:srgbClr val="111111"/>
                 </a:solidFill>
@@ -6619,9 +6619,55 @@
                 <a:ea typeface="Lato" pitchFamily="34" charset="-122"/>
                 <a:cs typeface="Lato" pitchFamily="34" charset="-120"/>
               </a:rPr>
-              <a:t>Save it as ML20. Write two sentences: what you changed and how you checked it.</a:t>
-            </a:r>
-            <a:endParaRPr lang="en-US" sz="2900" dirty="0"/>
+              <a:t>Save the notebook, your data dictionary and the cleaning log.</a:t>
+            </a:r>
+            <a:endParaRPr lang="en-US" sz="2600" dirty="0"/>
+          </a:p>
+          <a:p>
+            <a:pPr algn="l" indent="0" marL="0">
+              <a:lnSpc>
+                <a:spcPts val="3120"/>
+              </a:lnSpc>
+              <a:spcAft>
+                <a:spcPts val="2020"/>
+              </a:spcAft>
+              <a:buNone/>
+            </a:pPr>
+            <a:r>
+              <a:rPr lang="en-US" sz="2600" dirty="0">
+                <a:solidFill>
+                  <a:srgbClr val="111111"/>
+                </a:solidFill>
+                <a:latin typeface="Lato" pitchFamily="34" charset="0"/>
+                <a:ea typeface="Lato" pitchFamily="34" charset="-122"/>
+                <a:cs typeface="Lato" pitchFamily="34" charset="-120"/>
+              </a:rPr>
+              <a:t>If no cleaning was needed, record the checks that found nothing.</a:t>
+            </a:r>
+            <a:endParaRPr lang="en-US" sz="2600" dirty="0"/>
+          </a:p>
+          <a:p>
+            <a:pPr algn="l" indent="0" marL="0">
+              <a:lnSpc>
+                <a:spcPts val="3120"/>
+              </a:lnSpc>
+              <a:spcAft>
+                <a:spcPts val="2020"/>
+              </a:spcAft>
+              <a:buNone/>
+            </a:pPr>
+            <a:r>
+              <a:rPr lang="en-US" sz="2600" dirty="0">
+                <a:solidFill>
+                  <a:srgbClr val="111111"/>
+                </a:solidFill>
+                <a:latin typeface="Lato" pitchFamily="34" charset="0"/>
+                <a:ea typeface="Lato" pitchFamily="34" charset="-122"/>
+                <a:cs typeface="Lato" pitchFamily="34" charset="-120"/>
+              </a:rPr>
+              <a:t>Write two sentences: what you changed and how you checked it.</a:t>
+            </a:r>
+            <a:endParaRPr lang="en-US" sz="2600" dirty="0"/>
           </a:p>
         </p:txBody>
       </p:sp>
@@ -9453,7 +9499,7 @@
                 <a:ea typeface="Lato" pitchFamily="34" charset="-122"/>
                 <a:cs typeface="Lato" pitchFamily="34" charset="-120"/>
               </a:rPr>
-              <a:t>Read the first part of the code. 6 lines. Say what each one does.</a:t>
+              <a:t>Predict the three sizes and whether the baseline will miss fares by more than UGX 3000 on average.</a:t>
             </a:r>
             <a:endParaRPr lang="en-US" sz="2400" dirty="0"/>
           </a:p>
@@ -9476,7 +9522,7 @@
                 <a:ea typeface="Lato" pitchFamily="34" charset="-122"/>
                 <a:cs typeface="Lato" pitchFamily="34" charset="-120"/>
               </a:rPr>
-              <a:t>The second part comes next.</a:t>
+              <a:t>The rest of the code is on the next slide.</a:t>
             </a:r>
             <a:endParaRPr lang="en-US" sz="2400" dirty="0"/>
           </a:p>
@@ -9971,7 +10017,7 @@
                 <a:ea typeface="Lato" pitchFamily="34" charset="-122"/>
                 <a:cs typeface="Lato" pitchFamily="34" charset="-120"/>
               </a:rPr>
-              <a:t>Predict the three sizes and whether the baseline will miss fares by more than UGX 3000 on average.</a:t>
+              <a:t>This is the rest of the code. Keep your guess in mind.</a:t>
             </a:r>
             <a:endParaRPr lang="en-US" sz="2400" dirty="0"/>
           </a:p>
